--- a/s03/descargables/S03_ALU_01_Presentacion.pptx
+++ b/s03/descargables/S03_ALU_01_Presentacion.pptx
@@ -3569,6 +3569,10 @@
             <a:prstDash val="solid"/>
           </a:ln>
         </p:spPr>
+        <p:txBody>
+          <a:bodyPr/>
+          <a:p/>
+        </p:txBody>
       </p:sp>
       <p:sp>
         <p:nvSpPr>
@@ -3983,6 +3987,10 @@
             <a:prstDash val="solid"/>
           </a:ln>
         </p:spPr>
+        <p:txBody>
+          <a:bodyPr/>
+          <a:p/>
+        </p:txBody>
       </p:sp>
       <p:sp>
         <p:nvSpPr>
@@ -4172,6 +4180,10 @@
             <a:prstDash val="solid"/>
           </a:ln>
         </p:spPr>
+        <p:txBody>
+          <a:bodyPr/>
+          <a:p/>
+        </p:txBody>
       </p:sp>
       <p:sp>
         <p:nvSpPr>
@@ -4361,6 +4373,10 @@
             <a:prstDash val="solid"/>
           </a:ln>
         </p:spPr>
+        <p:txBody>
+          <a:bodyPr/>
+          <a:p/>
+        </p:txBody>
       </p:sp>
       <p:sp>
         <p:nvSpPr>
@@ -4550,6 +4566,10 @@
             <a:prstDash val="solid"/>
           </a:ln>
         </p:spPr>
+        <p:txBody>
+          <a:bodyPr/>
+          <a:p/>
+        </p:txBody>
       </p:sp>
       <p:sp>
         <p:nvSpPr>
@@ -4737,6 +4757,10 @@
             <a:prstDash val="solid"/>
           </a:ln>
         </p:spPr>
+        <p:txBody>
+          <a:bodyPr/>
+          <a:p/>
+        </p:txBody>
       </p:sp>
       <p:sp>
         <p:nvSpPr>
@@ -4973,6 +4997,10 @@
             <a:prstDash val="solid"/>
           </a:ln>
         </p:spPr>
+        <p:txBody>
+          <a:bodyPr/>
+          <a:p/>
+        </p:txBody>
       </p:sp>
       <p:sp>
         <p:nvSpPr>
@@ -5729,7 +5757,7 @@
                 <a:ea typeface="Arial" pitchFamily="34" charset="-122"/>
                 <a:cs typeface="Arial" pitchFamily="34" charset="-120"/>
               </a:rPr>
-              <a:t>La aplicación Consulta PEP 2.0 se entra con e.firma y estará disponible hasta el 30 de agosto de 2027. Hasta entonces, su manual tiene que decir contra qué fuentes verifica.</a:t>
+              <a:t>La aplicación Consulta PEP 2.0 se entra con e.firma y podrá consultarse a partir del 30 de agosto de 2027 (Transitorio Décimo). Hasta entonces, su manual tiene que decir contra qué fuentes verifica.</a:t>
             </a:r>
             <a:endParaRPr lang="en-US" sz="1350" dirty="0"/>
           </a:p>
@@ -5951,6 +5979,10 @@
             <a:prstDash val="solid"/>
           </a:ln>
         </p:spPr>
+        <p:txBody>
+          <a:bodyPr/>
+          <a:p/>
+        </p:txBody>
       </p:sp>
       <p:sp>
         <p:nvSpPr>
@@ -6098,6 +6130,10 @@
             <a:prstDash val="solid"/>
           </a:ln>
         </p:spPr>
+        <p:txBody>
+          <a:bodyPr/>
+          <a:p/>
+        </p:txBody>
       </p:sp>
       <p:sp>
         <p:nvSpPr>
@@ -6245,6 +6281,10 @@
             <a:prstDash val="solid"/>
           </a:ln>
         </p:spPr>
+        <p:txBody>
+          <a:bodyPr/>
+          <a:p/>
+        </p:txBody>
       </p:sp>
       <p:sp>
         <p:nvSpPr>
@@ -6581,6 +6621,10 @@
             <a:prstDash val="solid"/>
           </a:ln>
         </p:spPr>
+        <p:txBody>
+          <a:bodyPr/>
+          <a:p/>
+        </p:txBody>
       </p:sp>
       <p:sp>
         <p:nvSpPr>
@@ -6776,6 +6820,10 @@
             <a:prstDash val="solid"/>
           </a:ln>
         </p:spPr>
+        <p:txBody>
+          <a:bodyPr/>
+          <a:p/>
+        </p:txBody>
       </p:sp>
       <p:sp>
         <p:nvSpPr>
@@ -6886,6 +6934,10 @@
             <a:prstDash val="solid"/>
           </a:ln>
         </p:spPr>
+        <p:txBody>
+          <a:bodyPr/>
+          <a:p/>
+        </p:txBody>
       </p:sp>
       <p:sp>
         <p:nvSpPr>
@@ -7104,6 +7156,10 @@
             <a:prstDash val="solid"/>
           </a:ln>
         </p:spPr>
+        <p:txBody>
+          <a:bodyPr/>
+          <a:p/>
+        </p:txBody>
       </p:sp>
       <p:sp>
         <p:nvSpPr>
@@ -7401,6 +7457,10 @@
             <a:prstDash val="solid"/>
           </a:ln>
         </p:spPr>
+        <p:txBody>
+          <a:bodyPr/>
+          <a:p/>
+        </p:txBody>
       </p:sp>
       <p:sp>
         <p:nvSpPr>
@@ -7509,6 +7569,10 @@
             <a:prstDash val="solid"/>
           </a:ln>
         </p:spPr>
+        <p:txBody>
+          <a:bodyPr/>
+          <a:p/>
+        </p:txBody>
       </p:sp>
       <p:sp>
         <p:nvSpPr>
@@ -7617,6 +7681,10 @@
             <a:prstDash val="solid"/>
           </a:ln>
         </p:spPr>
+        <p:txBody>
+          <a:bodyPr/>
+          <a:p/>
+        </p:txBody>
       </p:sp>
       <p:sp>
         <p:nvSpPr>
@@ -8861,6 +8929,10 @@
             <a:prstDash val="solid"/>
           </a:ln>
         </p:spPr>
+        <p:txBody>
+          <a:bodyPr/>
+          <a:p/>
+        </p:txBody>
       </p:sp>
       <p:sp>
         <p:nvSpPr>
@@ -9197,6 +9269,10 @@
             <a:prstDash val="solid"/>
           </a:ln>
         </p:spPr>
+        <p:txBody>
+          <a:bodyPr/>
+          <a:p/>
+        </p:txBody>
       </p:sp>
       <p:sp>
         <p:nvSpPr>
@@ -9378,6 +9454,10 @@
             <a:prstDash val="solid"/>
           </a:ln>
         </p:spPr>
+        <p:txBody>
+          <a:bodyPr/>
+          <a:p/>
+        </p:txBody>
       </p:sp>
       <p:sp>
         <p:nvSpPr>
@@ -9747,6 +9827,10 @@
             <a:prstDash val="solid"/>
           </a:ln>
         </p:spPr>
+        <p:txBody>
+          <a:bodyPr/>
+          <a:p/>
+        </p:txBody>
       </p:sp>
       <p:sp>
         <p:nvSpPr>
@@ -9816,6 +9900,10 @@
             <a:prstDash val="solid"/>
           </a:ln>
         </p:spPr>
+        <p:txBody>
+          <a:bodyPr/>
+          <a:p/>
+        </p:txBody>
       </p:sp>
       <p:sp>
         <p:nvSpPr>
@@ -9966,6 +10054,10 @@
             <a:prstDash val="solid"/>
           </a:ln>
         </p:spPr>
+        <p:txBody>
+          <a:bodyPr/>
+          <a:p/>
+        </p:txBody>
       </p:sp>
       <p:sp>
         <p:nvSpPr>
@@ -10116,6 +10208,10 @@
             <a:prstDash val="solid"/>
           </a:ln>
         </p:spPr>
+        <p:txBody>
+          <a:bodyPr/>
+          <a:p/>
+        </p:txBody>
       </p:sp>
       <p:sp>
         <p:nvSpPr>
@@ -10374,6 +10470,10 @@
             <a:prstDash val="solid"/>
           </a:ln>
         </p:spPr>
+        <p:txBody>
+          <a:bodyPr/>
+          <a:p/>
+        </p:txBody>
       </p:sp>
       <p:sp>
         <p:nvSpPr>
@@ -10710,6 +10810,10 @@
             <a:prstDash val="solid"/>
           </a:ln>
         </p:spPr>
+        <p:txBody>
+          <a:bodyPr/>
+          <a:p/>
+        </p:txBody>
       </p:sp>
       <p:sp>
         <p:nvSpPr>
@@ -10779,6 +10883,10 @@
             <a:prstDash val="solid"/>
           </a:ln>
         </p:spPr>
+        <p:txBody>
+          <a:bodyPr/>
+          <a:p/>
+        </p:txBody>
       </p:sp>
       <p:sp>
         <p:nvSpPr>
@@ -10848,6 +10956,10 @@
             <a:prstDash val="solid"/>
           </a:ln>
         </p:spPr>
+        <p:txBody>
+          <a:bodyPr/>
+          <a:p/>
+        </p:txBody>
       </p:sp>
       <p:sp>
         <p:nvSpPr>
@@ -10917,6 +11029,10 @@
             <a:prstDash val="solid"/>
           </a:ln>
         </p:spPr>
+        <p:txBody>
+          <a:bodyPr/>
+          <a:p/>
+        </p:txBody>
       </p:sp>
       <p:sp>
         <p:nvSpPr>
@@ -10986,6 +11102,10 @@
             <a:prstDash val="solid"/>
           </a:ln>
         </p:spPr>
+        <p:txBody>
+          <a:bodyPr/>
+          <a:p/>
+        </p:txBody>
       </p:sp>
       <p:sp>
         <p:nvSpPr>
@@ -11055,6 +11175,10 @@
             <a:prstDash val="solid"/>
           </a:ln>
         </p:spPr>
+        <p:txBody>
+          <a:bodyPr/>
+          <a:p/>
+        </p:txBody>
       </p:sp>
       <p:sp>
         <p:nvSpPr>
@@ -11124,6 +11248,10 @@
             <a:prstDash val="solid"/>
           </a:ln>
         </p:spPr>
+        <p:txBody>
+          <a:bodyPr/>
+          <a:p/>
+        </p:txBody>
       </p:sp>
       <p:sp>
         <p:nvSpPr>
@@ -11193,6 +11321,10 @@
             <a:prstDash val="solid"/>
           </a:ln>
         </p:spPr>
+        <p:txBody>
+          <a:bodyPr/>
+          <a:p/>
+        </p:txBody>
       </p:sp>
       <p:sp>
         <p:nvSpPr>
@@ -12015,6 +12147,10 @@
             <a:prstDash val="solid"/>
           </a:ln>
         </p:spPr>
+        <p:txBody>
+          <a:bodyPr/>
+          <a:p/>
+        </p:txBody>
       </p:sp>
       <p:sp>
         <p:nvSpPr>
@@ -12488,6 +12624,10 @@
             <a:prstDash val="solid"/>
           </a:ln>
         </p:spPr>
+        <p:txBody>
+          <a:bodyPr/>
+          <a:p/>
+        </p:txBody>
       </p:sp>
       <p:sp>
         <p:nvSpPr>
@@ -12747,6 +12887,10 @@
             <a:prstDash val="solid"/>
           </a:ln>
         </p:spPr>
+        <p:txBody>
+          <a:bodyPr/>
+          <a:p/>
+        </p:txBody>
       </p:sp>
       <p:sp>
         <p:nvSpPr>
@@ -12855,6 +12999,10 @@
             <a:prstDash val="solid"/>
           </a:ln>
         </p:spPr>
+        <p:txBody>
+          <a:bodyPr/>
+          <a:p/>
+        </p:txBody>
       </p:sp>
       <p:sp>
         <p:nvSpPr>
@@ -12921,6 +13069,10 @@
             <a:prstDash val="solid"/>
           </a:ln>
         </p:spPr>
+        <p:txBody>
+          <a:bodyPr/>
+          <a:p/>
+        </p:txBody>
       </p:sp>
       <p:sp>
         <p:nvSpPr>
@@ -12987,6 +13139,10 @@
             <a:prstDash val="solid"/>
           </a:ln>
         </p:spPr>
+        <p:txBody>
+          <a:bodyPr/>
+          <a:p/>
+        </p:txBody>
       </p:sp>
       <p:sp>
         <p:nvSpPr>
@@ -13053,6 +13209,10 @@
             <a:prstDash val="solid"/>
           </a:ln>
         </p:spPr>
+        <p:txBody>
+          <a:bodyPr/>
+          <a:p/>
+        </p:txBody>
       </p:sp>
       <p:sp>
         <p:nvSpPr>
@@ -13119,6 +13279,10 @@
             <a:prstDash val="solid"/>
           </a:ln>
         </p:spPr>
+        <p:txBody>
+          <a:bodyPr/>
+          <a:p/>
+        </p:txBody>
       </p:sp>
       <p:sp>
         <p:nvSpPr>
@@ -13185,6 +13349,10 @@
             <a:prstDash val="solid"/>
           </a:ln>
         </p:spPr>
+        <p:txBody>
+          <a:bodyPr/>
+          <a:p/>
+        </p:txBody>
       </p:sp>
       <p:sp>
         <p:nvSpPr>
@@ -13251,6 +13419,10 @@
             <a:prstDash val="solid"/>
           </a:ln>
         </p:spPr>
+        <p:txBody>
+          <a:bodyPr/>
+          <a:p/>
+        </p:txBody>
       </p:sp>
       <p:sp>
         <p:nvSpPr>
@@ -13761,6 +13933,10 @@
             <a:prstDash val="solid"/>
           </a:ln>
         </p:spPr>
+        <p:txBody>
+          <a:bodyPr/>
+          <a:p/>
+        </p:txBody>
       </p:sp>
       <p:sp>
         <p:nvSpPr>
@@ -13869,6 +14045,10 @@
             <a:prstDash val="solid"/>
           </a:ln>
         </p:spPr>
+        <p:txBody>
+          <a:bodyPr/>
+          <a:p/>
+        </p:txBody>
       </p:sp>
       <p:sp>
         <p:nvSpPr>
@@ -13977,6 +14157,10 @@
             <a:prstDash val="solid"/>
           </a:ln>
         </p:spPr>
+        <p:txBody>
+          <a:bodyPr/>
+          <a:p/>
+        </p:txBody>
       </p:sp>
       <p:sp>
         <p:nvSpPr>
@@ -14154,6 +14338,10 @@
             <a:prstDash val="solid"/>
           </a:ln>
         </p:spPr>
+        <p:txBody>
+          <a:bodyPr/>
+          <a:p/>
+        </p:txBody>
       </p:sp>
       <p:sp>
         <p:nvSpPr>
@@ -14823,6 +15011,10 @@
             <a:prstDash val="solid"/>
           </a:ln>
         </p:spPr>
+        <p:txBody>
+          <a:bodyPr/>
+          <a:p/>
+        </p:txBody>
       </p:sp>
       <p:sp>
         <p:nvSpPr>
@@ -14973,6 +15165,10 @@
             <a:prstDash val="solid"/>
           </a:ln>
         </p:spPr>
+        <p:txBody>
+          <a:bodyPr/>
+          <a:p/>
+        </p:txBody>
       </p:sp>
       <p:sp>
         <p:nvSpPr>
@@ -15123,6 +15319,10 @@
             <a:prstDash val="solid"/>
           </a:ln>
         </p:spPr>
+        <p:txBody>
+          <a:bodyPr/>
+          <a:p/>
+        </p:txBody>
       </p:sp>
       <p:sp>
         <p:nvSpPr>
@@ -15273,6 +15473,10 @@
             <a:prstDash val="solid"/>
           </a:ln>
         </p:spPr>
+        <p:txBody>
+          <a:bodyPr/>
+          <a:p/>
+        </p:txBody>
       </p:sp>
       <p:sp>
         <p:nvSpPr>
@@ -15570,6 +15774,10 @@
             <a:prstDash val="solid"/>
           </a:ln>
         </p:spPr>
+        <p:txBody>
+          <a:bodyPr/>
+          <a:p/>
+        </p:txBody>
       </p:sp>
       <p:sp>
         <p:nvSpPr>
@@ -15639,6 +15847,10 @@
             <a:prstDash val="solid"/>
           </a:ln>
         </p:spPr>
+        <p:txBody>
+          <a:bodyPr/>
+          <a:p/>
+        </p:txBody>
       </p:sp>
       <p:sp>
         <p:nvSpPr>
@@ -15783,6 +15995,10 @@
             <a:prstDash val="solid"/>
           </a:ln>
         </p:spPr>
+        <p:txBody>
+          <a:bodyPr/>
+          <a:p/>
+        </p:txBody>
       </p:sp>
       <p:sp>
         <p:nvSpPr>
@@ -16884,6 +17100,10 @@
             <a:prstDash val="solid"/>
           </a:ln>
         </p:spPr>
+        <p:txBody>
+          <a:bodyPr/>
+          <a:p/>
+        </p:txBody>
       </p:sp>
       <p:sp>
         <p:nvSpPr>
@@ -17141,6 +17361,10 @@
             <a:prstDash val="solid"/>
           </a:ln>
         </p:spPr>
+        <p:txBody>
+          <a:bodyPr/>
+          <a:p/>
+        </p:txBody>
       </p:sp>
       <p:sp>
         <p:nvSpPr>
@@ -17288,6 +17512,10 @@
             <a:prstDash val="solid"/>
           </a:ln>
         </p:spPr>
+        <p:txBody>
+          <a:bodyPr/>
+          <a:p/>
+        </p:txBody>
       </p:sp>
       <p:sp>
         <p:nvSpPr>
@@ -17435,6 +17663,10 @@
             <a:prstDash val="solid"/>
           </a:ln>
         </p:spPr>
+        <p:txBody>
+          <a:bodyPr/>
+          <a:p/>
+        </p:txBody>
       </p:sp>
       <p:sp>
         <p:nvSpPr>
@@ -17582,6 +17814,10 @@
             <a:prstDash val="solid"/>
           </a:ln>
         </p:spPr>
+        <p:txBody>
+          <a:bodyPr/>
+          <a:p/>
+        </p:txBody>
       </p:sp>
       <p:sp>
         <p:nvSpPr>
@@ -17873,6 +18109,10 @@
             <a:prstDash val="solid"/>
           </a:ln>
         </p:spPr>
+        <p:txBody>
+          <a:bodyPr/>
+          <a:p/>
+        </p:txBody>
       </p:sp>
       <p:sp>
         <p:nvSpPr>
@@ -18017,6 +18257,10 @@
             <a:prstDash val="solid"/>
           </a:ln>
         </p:spPr>
+        <p:txBody>
+          <a:bodyPr/>
+          <a:p/>
+        </p:txBody>
       </p:sp>
       <p:sp>
         <p:nvSpPr>
@@ -18161,6 +18405,10 @@
             <a:prstDash val="solid"/>
           </a:ln>
         </p:spPr>
+        <p:txBody>
+          <a:bodyPr/>
+          <a:p/>
+        </p:txBody>
       </p:sp>
       <p:sp>
         <p:nvSpPr>
@@ -18305,6 +18553,10 @@
             <a:prstDash val="solid"/>
           </a:ln>
         </p:spPr>
+        <p:txBody>
+          <a:bodyPr/>
+          <a:p/>
+        </p:txBody>
       </p:sp>
       <p:sp>
         <p:nvSpPr>
@@ -18596,6 +18848,10 @@
             <a:prstDash val="solid"/>
           </a:ln>
         </p:spPr>
+        <p:txBody>
+          <a:bodyPr/>
+          <a:p/>
+        </p:txBody>
       </p:sp>
       <p:sp>
         <p:nvSpPr>
@@ -19210,6 +19466,10 @@
             <a:prstDash val="solid"/>
           </a:ln>
         </p:spPr>
+        <p:txBody>
+          <a:bodyPr/>
+          <a:p/>
+        </p:txBody>
       </p:sp>
       <p:sp>
         <p:nvSpPr>
@@ -19597,6 +19857,10 @@
             <a:prstDash val="solid"/>
           </a:ln>
         </p:spPr>
+        <p:txBody>
+          <a:bodyPr/>
+          <a:p/>
+        </p:txBody>
       </p:sp>
       <p:sp>
         <p:nvSpPr>
@@ -20130,6 +20394,10 @@
             <a:prstDash val="solid"/>
           </a:ln>
         </p:spPr>
+        <p:txBody>
+          <a:bodyPr/>
+          <a:p/>
+        </p:txBody>
       </p:sp>
       <p:sp>
         <p:nvSpPr>
@@ -20157,6 +20425,10 @@
             <a:prstDash val="solid"/>
           </a:ln>
         </p:spPr>
+        <p:txBody>
+          <a:bodyPr/>
+          <a:p/>
+        </p:txBody>
       </p:sp>
       <p:sp>
         <p:nvSpPr>
@@ -21005,6 +21277,10 @@
             <a:prstDash val="solid"/>
           </a:ln>
         </p:spPr>
+        <p:txBody>
+          <a:bodyPr/>
+          <a:p/>
+        </p:txBody>
       </p:sp>
       <p:sp>
         <p:nvSpPr>
@@ -21113,6 +21389,10 @@
             <a:prstDash val="solid"/>
           </a:ln>
         </p:spPr>
+        <p:txBody>
+          <a:bodyPr/>
+          <a:p/>
+        </p:txBody>
       </p:sp>
       <p:sp>
         <p:nvSpPr>
@@ -21221,6 +21501,10 @@
             <a:prstDash val="solid"/>
           </a:ln>
         </p:spPr>
+        <p:txBody>
+          <a:bodyPr/>
+          <a:p/>
+        </p:txBody>
       </p:sp>
       <p:sp>
         <p:nvSpPr>
@@ -21329,6 +21613,10 @@
             <a:prstDash val="solid"/>
           </a:ln>
         </p:spPr>
+        <p:txBody>
+          <a:bodyPr/>
+          <a:p/>
+        </p:txBody>
       </p:sp>
       <p:sp>
         <p:nvSpPr>
@@ -21437,6 +21725,10 @@
             <a:prstDash val="solid"/>
           </a:ln>
         </p:spPr>
+        <p:txBody>
+          <a:bodyPr/>
+          <a:p/>
+        </p:txBody>
       </p:sp>
       <p:sp>
         <p:nvSpPr>
@@ -21545,6 +21837,10 @@
             <a:prstDash val="solid"/>
           </a:ln>
         </p:spPr>
+        <p:txBody>
+          <a:bodyPr/>
+          <a:p/>
+        </p:txBody>
       </p:sp>
       <p:sp>
         <p:nvSpPr>
@@ -21653,6 +21949,10 @@
             <a:prstDash val="solid"/>
           </a:ln>
         </p:spPr>
+        <p:txBody>
+          <a:bodyPr/>
+          <a:p/>
+        </p:txBody>
       </p:sp>
       <p:sp>
         <p:nvSpPr>
@@ -21761,6 +22061,10 @@
             <a:prstDash val="solid"/>
           </a:ln>
         </p:spPr>
+        <p:txBody>
+          <a:bodyPr/>
+          <a:p/>
+        </p:txBody>
       </p:sp>
       <p:sp>
         <p:nvSpPr>
@@ -21869,6 +22173,10 @@
             <a:prstDash val="solid"/>
           </a:ln>
         </p:spPr>
+        <p:txBody>
+          <a:bodyPr/>
+          <a:p/>
+        </p:txBody>
       </p:sp>
       <p:sp>
         <p:nvSpPr>
@@ -21977,6 +22285,10 @@
             <a:prstDash val="solid"/>
           </a:ln>
         </p:spPr>
+        <p:txBody>
+          <a:bodyPr/>
+          <a:p/>
+        </p:txBody>
       </p:sp>
       <p:sp>
         <p:nvSpPr>
@@ -22085,6 +22397,10 @@
             <a:prstDash val="solid"/>
           </a:ln>
         </p:spPr>
+        <p:txBody>
+          <a:bodyPr/>
+          <a:p/>
+        </p:txBody>
       </p:sp>
       <p:sp>
         <p:nvSpPr>
@@ -22193,6 +22509,10 @@
             <a:prstDash val="solid"/>
           </a:ln>
         </p:spPr>
+        <p:txBody>
+          <a:bodyPr/>
+          <a:p/>
+        </p:txBody>
       </p:sp>
       <p:sp>
         <p:nvSpPr>
@@ -22301,6 +22621,10 @@
             <a:prstDash val="solid"/>
           </a:ln>
         </p:spPr>
+        <p:txBody>
+          <a:bodyPr/>
+          <a:p/>
+        </p:txBody>
       </p:sp>
       <p:sp>
         <p:nvSpPr>
@@ -22409,6 +22733,10 @@
             <a:prstDash val="solid"/>
           </a:ln>
         </p:spPr>
+        <p:txBody>
+          <a:bodyPr/>
+          <a:p/>
+        </p:txBody>
       </p:sp>
       <p:sp>
         <p:nvSpPr>
@@ -22785,6 +23113,10 @@
             <a:prstDash val="solid"/>
           </a:ln>
         </p:spPr>
+        <p:txBody>
+          <a:bodyPr/>
+          <a:p/>
+        </p:txBody>
       </p:sp>
       <p:sp>
         <p:nvSpPr>
@@ -23121,6 +23453,10 @@
             <a:prstDash val="solid"/>
           </a:ln>
         </p:spPr>
+        <p:txBody>
+          <a:bodyPr/>
+          <a:p/>
+        </p:txBody>
       </p:sp>
       <p:sp>
         <p:nvSpPr>
@@ -23331,6 +23667,10 @@
             <a:prstDash val="solid"/>
           </a:ln>
         </p:spPr>
+        <p:txBody>
+          <a:bodyPr/>
+          <a:p/>
+        </p:txBody>
       </p:sp>
       <p:sp>
         <p:nvSpPr>
